--- a/.lessons/58 Backend Product And Related Features/9 Product- Working with create form (part-1)/1.pptx
+++ b/.lessons/58 Backend Product And Related Features/9 Product- Working with create form (part-1)/1.pptx
@@ -8,6 +8,20 @@
     <p:sldId id="413" r:id="rId2"/>
     <p:sldId id="414" r:id="rId3"/>
     <p:sldId id="400" r:id="rId4"/>
+    <p:sldId id="415" r:id="rId5"/>
+    <p:sldId id="416" r:id="rId6"/>
+    <p:sldId id="417" r:id="rId7"/>
+    <p:sldId id="419" r:id="rId8"/>
+    <p:sldId id="420" r:id="rId9"/>
+    <p:sldId id="421" r:id="rId10"/>
+    <p:sldId id="422" r:id="rId11"/>
+    <p:sldId id="423" r:id="rId12"/>
+    <p:sldId id="427" r:id="rId13"/>
+    <p:sldId id="425" r:id="rId14"/>
+    <p:sldId id="426" r:id="rId15"/>
+    <p:sldId id="424" r:id="rId16"/>
+    <p:sldId id="428" r:id="rId17"/>
+    <p:sldId id="418" r:id="rId18"/>
   </p:sldIdLst>
   <p:sldSz cx="12192000" cy="6858000"/>
   <p:notesSz cx="6858000" cy="9144000"/>
@@ -261,7 +275,7 @@
           <a:p>
             <a:fld id="{3E102D2E-813C-461C-9963-687A650C48C0}" type="datetimeFigureOut">
               <a:rPr lang="en-US" smtClean="0"/>
-              <a:t>6/26/2025</a:t>
+              <a:t>9/10/2025</a:t>
             </a:fld>
             <a:endParaRPr lang="en-US"/>
           </a:p>
@@ -459,7 +473,7 @@
           <a:p>
             <a:fld id="{3E102D2E-813C-461C-9963-687A650C48C0}" type="datetimeFigureOut">
               <a:rPr lang="en-US" smtClean="0"/>
-              <a:t>6/26/2025</a:t>
+              <a:t>9/10/2025</a:t>
             </a:fld>
             <a:endParaRPr lang="en-US"/>
           </a:p>
@@ -667,7 +681,7 @@
           <a:p>
             <a:fld id="{3E102D2E-813C-461C-9963-687A650C48C0}" type="datetimeFigureOut">
               <a:rPr lang="en-US" smtClean="0"/>
-              <a:t>6/26/2025</a:t>
+              <a:t>9/10/2025</a:t>
             </a:fld>
             <a:endParaRPr lang="en-US"/>
           </a:p>
@@ -865,7 +879,7 @@
           <a:p>
             <a:fld id="{3E102D2E-813C-461C-9963-687A650C48C0}" type="datetimeFigureOut">
               <a:rPr lang="en-US" smtClean="0"/>
-              <a:t>6/26/2025</a:t>
+              <a:t>9/10/2025</a:t>
             </a:fld>
             <a:endParaRPr lang="en-US"/>
           </a:p>
@@ -1140,7 +1154,7 @@
           <a:p>
             <a:fld id="{3E102D2E-813C-461C-9963-687A650C48C0}" type="datetimeFigureOut">
               <a:rPr lang="en-US" smtClean="0"/>
-              <a:t>6/26/2025</a:t>
+              <a:t>9/10/2025</a:t>
             </a:fld>
             <a:endParaRPr lang="en-US"/>
           </a:p>
@@ -1405,7 +1419,7 @@
           <a:p>
             <a:fld id="{3E102D2E-813C-461C-9963-687A650C48C0}" type="datetimeFigureOut">
               <a:rPr lang="en-US" smtClean="0"/>
-              <a:t>6/26/2025</a:t>
+              <a:t>9/10/2025</a:t>
             </a:fld>
             <a:endParaRPr lang="en-US"/>
           </a:p>
@@ -1817,7 +1831,7 @@
           <a:p>
             <a:fld id="{3E102D2E-813C-461C-9963-687A650C48C0}" type="datetimeFigureOut">
               <a:rPr lang="en-US" smtClean="0"/>
-              <a:t>6/26/2025</a:t>
+              <a:t>9/10/2025</a:t>
             </a:fld>
             <a:endParaRPr lang="en-US"/>
           </a:p>
@@ -1958,7 +1972,7 @@
           <a:p>
             <a:fld id="{3E102D2E-813C-461C-9963-687A650C48C0}" type="datetimeFigureOut">
               <a:rPr lang="en-US" smtClean="0"/>
-              <a:t>6/26/2025</a:t>
+              <a:t>9/10/2025</a:t>
             </a:fld>
             <a:endParaRPr lang="en-US"/>
           </a:p>
@@ -2071,7 +2085,7 @@
           <a:p>
             <a:fld id="{3E102D2E-813C-461C-9963-687A650C48C0}" type="datetimeFigureOut">
               <a:rPr lang="en-US" smtClean="0"/>
-              <a:t>6/26/2025</a:t>
+              <a:t>9/10/2025</a:t>
             </a:fld>
             <a:endParaRPr lang="en-US"/>
           </a:p>
@@ -2382,7 +2396,7 @@
           <a:p>
             <a:fld id="{3E102D2E-813C-461C-9963-687A650C48C0}" type="datetimeFigureOut">
               <a:rPr lang="en-US" smtClean="0"/>
-              <a:t>6/26/2025</a:t>
+              <a:t>9/10/2025</a:t>
             </a:fld>
             <a:endParaRPr lang="en-US"/>
           </a:p>
@@ -2670,7 +2684,7 @@
           <a:p>
             <a:fld id="{3E102D2E-813C-461C-9963-687A650C48C0}" type="datetimeFigureOut">
               <a:rPr lang="en-US" smtClean="0"/>
-              <a:t>6/26/2025</a:t>
+              <a:t>9/10/2025</a:t>
             </a:fld>
             <a:endParaRPr lang="en-US"/>
           </a:p>
@@ -2911,7 +2925,7 @@
           <a:p>
             <a:fld id="{3E102D2E-813C-461C-9963-687A650C48C0}" type="datetimeFigureOut">
               <a:rPr lang="en-US" smtClean="0"/>
-              <a:t>6/26/2025</a:t>
+              <a:t>9/10/2025</a:t>
             </a:fld>
             <a:endParaRPr lang="en-US"/>
           </a:p>
@@ -3369,6 +3383,483 @@
               <a:buNone/>
             </a:pPr>
             <a:r>
+              <a:rPr lang="en-US" altLang="en-US" sz="1300">
+                <a:latin typeface="Arial" panose="020B0604020202020204" pitchFamily="34" charset="0"/>
+              </a:rPr>
+              <a:t>resources\views\admin\layouts\sidebar.blade.php</a:t>
+            </a:r>
+            <a:endParaRPr kumimoji="0" lang="en-US" altLang="en-US" sz="1300" b="0" i="0" u="none" strike="noStrike" cap="none" normalizeH="0" baseline="0">
+              <a:ln>
+                <a:noFill/>
+              </a:ln>
+              <a:solidFill>
+                <a:schemeClr val="tx1"/>
+              </a:solidFill>
+              <a:effectLst/>
+              <a:latin typeface="Arial" panose="020B0604020202020204" pitchFamily="34" charset="0"/>
+            </a:endParaRPr>
+          </a:p>
+        </p:txBody>
+      </p:sp>
+      <p:pic>
+        <p:nvPicPr>
+          <p:cNvPr id="6" name="Picture 5">
+            <a:extLst>
+              <a:ext uri="{FF2B5EF4-FFF2-40B4-BE49-F238E27FC236}">
+                <a16:creationId xmlns:a16="http://schemas.microsoft.com/office/drawing/2014/main" id="{8FABAC4C-9E4D-3402-C6BD-1F46C58E18DF}"/>
+              </a:ext>
+            </a:extLst>
+          </p:cNvPr>
+          <p:cNvPicPr>
+            <a:picLocks noChangeAspect="1"/>
+          </p:cNvPicPr>
+          <p:nvPr/>
+        </p:nvPicPr>
+        <p:blipFill>
+          <a:blip r:embed="rId2"/>
+          <a:stretch>
+            <a:fillRect/>
+          </a:stretch>
+        </p:blipFill>
+        <p:spPr>
+          <a:xfrm>
+            <a:off x="3472873" y="845278"/>
+            <a:ext cx="8719127" cy="6012721"/>
+          </a:xfrm>
+          <a:prstGeom prst="rect">
+            <a:avLst/>
+          </a:prstGeom>
+        </p:spPr>
+      </p:pic>
+    </p:spTree>
+    <p:extLst>
+      <p:ext uri="{BB962C8B-B14F-4D97-AF65-F5344CB8AC3E}">
+        <p14:creationId xmlns:p14="http://schemas.microsoft.com/office/powerpoint/2010/main" val="3863838039"/>
+      </p:ext>
+    </p:extLst>
+  </p:cSld>
+  <p:clrMapOvr>
+    <a:masterClrMapping/>
+  </p:clrMapOvr>
+</p:sld>
+</file>
+
+<file path=ppt/slides/slide10.xml><?xml version="1.0" encoding="utf-8"?>
+<p:sld xmlns:a="http://schemas.openxmlformats.org/drawingml/2006/main" xmlns:r="http://schemas.openxmlformats.org/officeDocument/2006/relationships" xmlns:p="http://schemas.openxmlformats.org/presentationml/2006/main">
+  <p:cSld>
+    <p:spTree>
+      <p:nvGrpSpPr>
+        <p:cNvPr id="1" name="">
+          <a:extLst>
+            <a:ext uri="{FF2B5EF4-FFF2-40B4-BE49-F238E27FC236}">
+              <a16:creationId xmlns:a16="http://schemas.microsoft.com/office/drawing/2014/main" id="{881F1883-F76C-0CF3-F56F-E643D8BA0827}"/>
+            </a:ext>
+          </a:extLst>
+        </p:cNvPr>
+        <p:cNvGrpSpPr/>
+        <p:nvPr/>
+      </p:nvGrpSpPr>
+      <p:grpSpPr>
+        <a:xfrm>
+          <a:off x="0" y="0"/>
+          <a:ext cx="0" cy="0"/>
+          <a:chOff x="0" y="0"/>
+          <a:chExt cx="0" cy="0"/>
+        </a:xfrm>
+      </p:grpSpPr>
+      <p:sp>
+        <p:nvSpPr>
+          <p:cNvPr id="3" name="TextBox 2">
+            <a:extLst>
+              <a:ext uri="{FF2B5EF4-FFF2-40B4-BE49-F238E27FC236}">
+                <a16:creationId xmlns:a16="http://schemas.microsoft.com/office/drawing/2014/main" id="{BA4330AD-F40A-8DC0-8EF8-E6FF7677D90C}"/>
+              </a:ext>
+            </a:extLst>
+          </p:cNvPr>
+          <p:cNvSpPr txBox="1"/>
+          <p:nvPr/>
+        </p:nvSpPr>
+        <p:spPr>
+          <a:xfrm>
+            <a:off x="217714" y="255046"/>
+            <a:ext cx="11756571" cy="355354"/>
+          </a:xfrm>
+          <a:prstGeom prst="rect">
+            <a:avLst/>
+          </a:prstGeom>
+          <a:noFill/>
+        </p:spPr>
+        <p:txBody>
+          <a:bodyPr wrap="square">
+            <a:spAutoFit/>
+          </a:bodyPr>
+          <a:lstStyle/>
+          <a:p>
+            <a:pPr>
+              <a:lnSpc>
+                <a:spcPct val="150000"/>
+              </a:lnSpc>
+              <a:buNone/>
+            </a:pPr>
+            <a:r>
+              <a:rPr lang="en-US" altLang="en-US" sz="1300">
+                <a:latin typeface="Arial" panose="020B0604020202020204" pitchFamily="34" charset="0"/>
+              </a:rPr>
+              <a:t>resources\views\admin\product\create.blade.php</a:t>
+            </a:r>
+            <a:endParaRPr kumimoji="0" lang="en-US" altLang="en-US" sz="1300" b="0" i="0" u="none" strike="noStrike" cap="none" normalizeH="0" baseline="0">
+              <a:ln>
+                <a:noFill/>
+              </a:ln>
+              <a:solidFill>
+                <a:schemeClr val="tx1"/>
+              </a:solidFill>
+              <a:effectLst/>
+              <a:latin typeface="Arial" panose="020B0604020202020204" pitchFamily="34" charset="0"/>
+            </a:endParaRPr>
+          </a:p>
+        </p:txBody>
+      </p:sp>
+      <p:pic>
+        <p:nvPicPr>
+          <p:cNvPr id="4" name="Picture 3">
+            <a:extLst>
+              <a:ext uri="{FF2B5EF4-FFF2-40B4-BE49-F238E27FC236}">
+                <a16:creationId xmlns:a16="http://schemas.microsoft.com/office/drawing/2014/main" id="{47EAC1EC-D9FB-9D03-016B-F88DB6913617}"/>
+              </a:ext>
+            </a:extLst>
+          </p:cNvPr>
+          <p:cNvPicPr>
+            <a:picLocks noChangeAspect="1"/>
+          </p:cNvPicPr>
+          <p:nvPr/>
+        </p:nvPicPr>
+        <p:blipFill>
+          <a:blip r:embed="rId2"/>
+          <a:stretch>
+            <a:fillRect/>
+          </a:stretch>
+        </p:blipFill>
+        <p:spPr>
+          <a:xfrm>
+            <a:off x="4102724" y="0"/>
+            <a:ext cx="8089276" cy="6858000"/>
+          </a:xfrm>
+          <a:prstGeom prst="rect">
+            <a:avLst/>
+          </a:prstGeom>
+        </p:spPr>
+      </p:pic>
+    </p:spTree>
+    <p:extLst>
+      <p:ext uri="{BB962C8B-B14F-4D97-AF65-F5344CB8AC3E}">
+        <p14:creationId xmlns:p14="http://schemas.microsoft.com/office/powerpoint/2010/main" val="1703206352"/>
+      </p:ext>
+    </p:extLst>
+  </p:cSld>
+  <p:clrMapOvr>
+    <a:masterClrMapping/>
+  </p:clrMapOvr>
+</p:sld>
+</file>
+
+<file path=ppt/slides/slide11.xml><?xml version="1.0" encoding="utf-8"?>
+<p:sld xmlns:a="http://schemas.openxmlformats.org/drawingml/2006/main" xmlns:r="http://schemas.openxmlformats.org/officeDocument/2006/relationships" xmlns:p="http://schemas.openxmlformats.org/presentationml/2006/main">
+  <p:cSld>
+    <p:spTree>
+      <p:nvGrpSpPr>
+        <p:cNvPr id="1" name="">
+          <a:extLst>
+            <a:ext uri="{FF2B5EF4-FFF2-40B4-BE49-F238E27FC236}">
+              <a16:creationId xmlns:a16="http://schemas.microsoft.com/office/drawing/2014/main" id="{4AF7EA07-5F4E-82DC-D3B7-61B817F685DA}"/>
+            </a:ext>
+          </a:extLst>
+        </p:cNvPr>
+        <p:cNvGrpSpPr/>
+        <p:nvPr/>
+      </p:nvGrpSpPr>
+      <p:grpSpPr>
+        <a:xfrm>
+          <a:off x="0" y="0"/>
+          <a:ext cx="0" cy="0"/>
+          <a:chOff x="0" y="0"/>
+          <a:chExt cx="0" cy="0"/>
+        </a:xfrm>
+      </p:grpSpPr>
+      <p:sp>
+        <p:nvSpPr>
+          <p:cNvPr id="3" name="TextBox 2">
+            <a:extLst>
+              <a:ext uri="{FF2B5EF4-FFF2-40B4-BE49-F238E27FC236}">
+                <a16:creationId xmlns:a16="http://schemas.microsoft.com/office/drawing/2014/main" id="{7C309DB2-31FB-7C02-4E80-DD4D3FD030D4}"/>
+              </a:ext>
+            </a:extLst>
+          </p:cNvPr>
+          <p:cNvSpPr txBox="1"/>
+          <p:nvPr/>
+        </p:nvSpPr>
+        <p:spPr>
+          <a:xfrm>
+            <a:off x="79169" y="144210"/>
+            <a:ext cx="11756571" cy="355354"/>
+          </a:xfrm>
+          <a:prstGeom prst="rect">
+            <a:avLst/>
+          </a:prstGeom>
+          <a:noFill/>
+        </p:spPr>
+        <p:txBody>
+          <a:bodyPr wrap="square">
+            <a:spAutoFit/>
+          </a:bodyPr>
+          <a:lstStyle/>
+          <a:p>
+            <a:pPr>
+              <a:lnSpc>
+                <a:spcPct val="150000"/>
+              </a:lnSpc>
+              <a:buNone/>
+            </a:pPr>
+            <a:r>
+              <a:rPr lang="en-US" altLang="en-US" sz="1300">
+                <a:latin typeface="Arial" panose="020B0604020202020204" pitchFamily="34" charset="0"/>
+              </a:rPr>
+              <a:t>resources\views\admin\product\create.blade.php</a:t>
+            </a:r>
+            <a:endParaRPr kumimoji="0" lang="en-US" altLang="en-US" sz="1300" b="0" i="0" u="none" strike="noStrike" cap="none" normalizeH="0" baseline="0">
+              <a:ln>
+                <a:noFill/>
+              </a:ln>
+              <a:solidFill>
+                <a:schemeClr val="tx1"/>
+              </a:solidFill>
+              <a:effectLst/>
+              <a:latin typeface="Arial" panose="020B0604020202020204" pitchFamily="34" charset="0"/>
+            </a:endParaRPr>
+          </a:p>
+        </p:txBody>
+      </p:sp>
+      <p:pic>
+        <p:nvPicPr>
+          <p:cNvPr id="4" name="Picture 3">
+            <a:extLst>
+              <a:ext uri="{FF2B5EF4-FFF2-40B4-BE49-F238E27FC236}">
+                <a16:creationId xmlns:a16="http://schemas.microsoft.com/office/drawing/2014/main" id="{1790CC8B-3249-F16B-9A5D-83E118145047}"/>
+              </a:ext>
+            </a:extLst>
+          </p:cNvPr>
+          <p:cNvPicPr>
+            <a:picLocks noChangeAspect="1"/>
+          </p:cNvPicPr>
+          <p:nvPr/>
+        </p:nvPicPr>
+        <p:blipFill>
+          <a:blip r:embed="rId2"/>
+          <a:srcRect r="4571" b="30371"/>
+          <a:stretch>
+            <a:fillRect/>
+          </a:stretch>
+        </p:blipFill>
+        <p:spPr>
+          <a:xfrm>
+            <a:off x="3901907" y="2082800"/>
+            <a:ext cx="8290093" cy="4775200"/>
+          </a:xfrm>
+          <a:prstGeom prst="rect">
+            <a:avLst/>
+          </a:prstGeom>
+        </p:spPr>
+      </p:pic>
+    </p:spTree>
+    <p:extLst>
+      <p:ext uri="{BB962C8B-B14F-4D97-AF65-F5344CB8AC3E}">
+        <p14:creationId xmlns:p14="http://schemas.microsoft.com/office/powerpoint/2010/main" val="4135498224"/>
+      </p:ext>
+    </p:extLst>
+  </p:cSld>
+  <p:clrMapOvr>
+    <a:masterClrMapping/>
+  </p:clrMapOvr>
+</p:sld>
+</file>
+
+<file path=ppt/slides/slide12.xml><?xml version="1.0" encoding="utf-8"?>
+<p:sld xmlns:a="http://schemas.openxmlformats.org/drawingml/2006/main" xmlns:r="http://schemas.openxmlformats.org/officeDocument/2006/relationships" xmlns:p="http://schemas.openxmlformats.org/presentationml/2006/main">
+  <p:cSld>
+    <p:spTree>
+      <p:nvGrpSpPr>
+        <p:cNvPr id="1" name="">
+          <a:extLst>
+            <a:ext uri="{FF2B5EF4-FFF2-40B4-BE49-F238E27FC236}">
+              <a16:creationId xmlns:a16="http://schemas.microsoft.com/office/drawing/2014/main" id="{914C2D2F-D9D1-77C0-DEAB-82AB1E9ED186}"/>
+            </a:ext>
+          </a:extLst>
+        </p:cNvPr>
+        <p:cNvGrpSpPr/>
+        <p:nvPr/>
+      </p:nvGrpSpPr>
+      <p:grpSpPr>
+        <a:xfrm>
+          <a:off x="0" y="0"/>
+          <a:ext cx="0" cy="0"/>
+          <a:chOff x="0" y="0"/>
+          <a:chExt cx="0" cy="0"/>
+        </a:xfrm>
+      </p:grpSpPr>
+      <p:sp>
+        <p:nvSpPr>
+          <p:cNvPr id="3" name="TextBox 2">
+            <a:extLst>
+              <a:ext uri="{FF2B5EF4-FFF2-40B4-BE49-F238E27FC236}">
+                <a16:creationId xmlns:a16="http://schemas.microsoft.com/office/drawing/2014/main" id="{6EAA528D-FF3D-FD76-B002-5471CF7ED1AE}"/>
+              </a:ext>
+            </a:extLst>
+          </p:cNvPr>
+          <p:cNvSpPr txBox="1"/>
+          <p:nvPr/>
+        </p:nvSpPr>
+        <p:spPr>
+          <a:xfrm>
+            <a:off x="217714" y="153446"/>
+            <a:ext cx="11756571" cy="355354"/>
+          </a:xfrm>
+          <a:prstGeom prst="rect">
+            <a:avLst/>
+          </a:prstGeom>
+          <a:noFill/>
+        </p:spPr>
+        <p:txBody>
+          <a:bodyPr wrap="square">
+            <a:spAutoFit/>
+          </a:bodyPr>
+          <a:lstStyle/>
+          <a:p>
+            <a:pPr>
+              <a:lnSpc>
+                <a:spcPct val="150000"/>
+              </a:lnSpc>
+              <a:buNone/>
+            </a:pPr>
+            <a:r>
+              <a:rPr lang="en-US" altLang="en-US" sz="1300">
+                <a:latin typeface="Arial" panose="020B0604020202020204" pitchFamily="34" charset="0"/>
+              </a:rPr>
+              <a:t>resources\views\admin\product\create.blade.php</a:t>
+            </a:r>
+            <a:endParaRPr kumimoji="0" lang="en-US" altLang="en-US" sz="1300" b="0" i="0" u="none" strike="noStrike" cap="none" normalizeH="0" baseline="0">
+              <a:ln>
+                <a:noFill/>
+              </a:ln>
+              <a:solidFill>
+                <a:schemeClr val="tx1"/>
+              </a:solidFill>
+              <a:effectLst/>
+              <a:latin typeface="Arial" panose="020B0604020202020204" pitchFamily="34" charset="0"/>
+            </a:endParaRPr>
+          </a:p>
+        </p:txBody>
+      </p:sp>
+      <p:pic>
+        <p:nvPicPr>
+          <p:cNvPr id="4" name="Picture 3">
+            <a:extLst>
+              <a:ext uri="{FF2B5EF4-FFF2-40B4-BE49-F238E27FC236}">
+                <a16:creationId xmlns:a16="http://schemas.microsoft.com/office/drawing/2014/main" id="{02451BA1-C473-F683-24A7-ED001FEE318C}"/>
+              </a:ext>
+            </a:extLst>
+          </p:cNvPr>
+          <p:cNvPicPr>
+            <a:picLocks noChangeAspect="1"/>
+          </p:cNvPicPr>
+          <p:nvPr/>
+        </p:nvPicPr>
+        <p:blipFill>
+          <a:blip r:embed="rId2"/>
+          <a:stretch>
+            <a:fillRect/>
+          </a:stretch>
+        </p:blipFill>
+        <p:spPr>
+          <a:xfrm>
+            <a:off x="831272" y="832455"/>
+            <a:ext cx="11360727" cy="6025545"/>
+          </a:xfrm>
+          <a:prstGeom prst="rect">
+            <a:avLst/>
+          </a:prstGeom>
+        </p:spPr>
+      </p:pic>
+    </p:spTree>
+    <p:extLst>
+      <p:ext uri="{BB962C8B-B14F-4D97-AF65-F5344CB8AC3E}">
+        <p14:creationId xmlns:p14="http://schemas.microsoft.com/office/powerpoint/2010/main" val="3422943943"/>
+      </p:ext>
+    </p:extLst>
+  </p:cSld>
+  <p:clrMapOvr>
+    <a:masterClrMapping/>
+  </p:clrMapOvr>
+</p:sld>
+</file>
+
+<file path=ppt/slides/slide13.xml><?xml version="1.0" encoding="utf-8"?>
+<p:sld xmlns:a="http://schemas.openxmlformats.org/drawingml/2006/main" xmlns:r="http://schemas.openxmlformats.org/officeDocument/2006/relationships" xmlns:p="http://schemas.openxmlformats.org/presentationml/2006/main">
+  <p:cSld>
+    <p:spTree>
+      <p:nvGrpSpPr>
+        <p:cNvPr id="1" name="">
+          <a:extLst>
+            <a:ext uri="{FF2B5EF4-FFF2-40B4-BE49-F238E27FC236}">
+              <a16:creationId xmlns:a16="http://schemas.microsoft.com/office/drawing/2014/main" id="{7D451772-EB5D-7498-85AA-2E66D1B8772E}"/>
+            </a:ext>
+          </a:extLst>
+        </p:cNvPr>
+        <p:cNvGrpSpPr/>
+        <p:nvPr/>
+      </p:nvGrpSpPr>
+      <p:grpSpPr>
+        <a:xfrm>
+          <a:off x="0" y="0"/>
+          <a:ext cx="0" cy="0"/>
+          <a:chOff x="0" y="0"/>
+          <a:chExt cx="0" cy="0"/>
+        </a:xfrm>
+      </p:grpSpPr>
+      <p:sp>
+        <p:nvSpPr>
+          <p:cNvPr id="3" name="TextBox 2">
+            <a:extLst>
+              <a:ext uri="{FF2B5EF4-FFF2-40B4-BE49-F238E27FC236}">
+                <a16:creationId xmlns:a16="http://schemas.microsoft.com/office/drawing/2014/main" id="{C7A0B992-8923-FD3B-E090-7357E517D491}"/>
+              </a:ext>
+            </a:extLst>
+          </p:cNvPr>
+          <p:cNvSpPr txBox="1"/>
+          <p:nvPr/>
+        </p:nvSpPr>
+        <p:spPr>
+          <a:xfrm>
+            <a:off x="217714" y="255046"/>
+            <a:ext cx="11756571" cy="355354"/>
+          </a:xfrm>
+          <a:prstGeom prst="rect">
+            <a:avLst/>
+          </a:prstGeom>
+          <a:noFill/>
+        </p:spPr>
+        <p:txBody>
+          <a:bodyPr wrap="square">
+            <a:spAutoFit/>
+          </a:bodyPr>
+          <a:lstStyle/>
+          <a:p>
+            <a:pPr>
+              <a:lnSpc>
+                <a:spcPct val="150000"/>
+              </a:lnSpc>
+              <a:buNone/>
+            </a:pPr>
+            <a:r>
               <a:rPr kumimoji="0" lang="en-US" altLang="en-US" sz="1300" b="0" i="0" u="none" strike="noStrike" cap="none" normalizeH="0" baseline="0">
                 <a:ln>
                   <a:noFill/>
@@ -3384,10 +3875,461 @@
           </a:p>
         </p:txBody>
       </p:sp>
+      <p:pic>
+        <p:nvPicPr>
+          <p:cNvPr id="4" name="Picture 3">
+            <a:extLst>
+              <a:ext uri="{FF2B5EF4-FFF2-40B4-BE49-F238E27FC236}">
+                <a16:creationId xmlns:a16="http://schemas.microsoft.com/office/drawing/2014/main" id="{0A6476CB-B8DC-8D2E-699F-EA09638A2E83}"/>
+              </a:ext>
+            </a:extLst>
+          </p:cNvPr>
+          <p:cNvPicPr>
+            <a:picLocks noChangeAspect="1"/>
+          </p:cNvPicPr>
+          <p:nvPr/>
+        </p:nvPicPr>
+        <p:blipFill>
+          <a:blip r:embed="rId2"/>
+          <a:stretch>
+            <a:fillRect/>
+          </a:stretch>
+        </p:blipFill>
+        <p:spPr>
+          <a:xfrm>
+            <a:off x="1179563" y="3304679"/>
+            <a:ext cx="11012437" cy="3553321"/>
+          </a:xfrm>
+          <a:prstGeom prst="rect">
+            <a:avLst/>
+          </a:prstGeom>
+        </p:spPr>
+      </p:pic>
     </p:spTree>
     <p:extLst>
       <p:ext uri="{BB962C8B-B14F-4D97-AF65-F5344CB8AC3E}">
-        <p14:creationId xmlns:p14="http://schemas.microsoft.com/office/powerpoint/2010/main" val="3863838039"/>
+        <p14:creationId xmlns:p14="http://schemas.microsoft.com/office/powerpoint/2010/main" val="2008736497"/>
+      </p:ext>
+    </p:extLst>
+  </p:cSld>
+  <p:clrMapOvr>
+    <a:masterClrMapping/>
+  </p:clrMapOvr>
+</p:sld>
+</file>
+
+<file path=ppt/slides/slide14.xml><?xml version="1.0" encoding="utf-8"?>
+<p:sld xmlns:a="http://schemas.openxmlformats.org/drawingml/2006/main" xmlns:r="http://schemas.openxmlformats.org/officeDocument/2006/relationships" xmlns:p="http://schemas.openxmlformats.org/presentationml/2006/main">
+  <p:cSld>
+    <p:spTree>
+      <p:nvGrpSpPr>
+        <p:cNvPr id="1" name="">
+          <a:extLst>
+            <a:ext uri="{FF2B5EF4-FFF2-40B4-BE49-F238E27FC236}">
+              <a16:creationId xmlns:a16="http://schemas.microsoft.com/office/drawing/2014/main" id="{F9F8397E-648F-8AEB-64CC-7683F1045BE5}"/>
+            </a:ext>
+          </a:extLst>
+        </p:cNvPr>
+        <p:cNvGrpSpPr/>
+        <p:nvPr/>
+      </p:nvGrpSpPr>
+      <p:grpSpPr>
+        <a:xfrm>
+          <a:off x="0" y="0"/>
+          <a:ext cx="0" cy="0"/>
+          <a:chOff x="0" y="0"/>
+          <a:chExt cx="0" cy="0"/>
+        </a:xfrm>
+      </p:grpSpPr>
+      <p:sp>
+        <p:nvSpPr>
+          <p:cNvPr id="3" name="TextBox 2">
+            <a:extLst>
+              <a:ext uri="{FF2B5EF4-FFF2-40B4-BE49-F238E27FC236}">
+                <a16:creationId xmlns:a16="http://schemas.microsoft.com/office/drawing/2014/main" id="{81029FF4-3E5A-633D-536B-20881854E95F}"/>
+              </a:ext>
+            </a:extLst>
+          </p:cNvPr>
+          <p:cNvSpPr txBox="1"/>
+          <p:nvPr/>
+        </p:nvSpPr>
+        <p:spPr>
+          <a:xfrm>
+            <a:off x="217714" y="255046"/>
+            <a:ext cx="11756571" cy="355354"/>
+          </a:xfrm>
+          <a:prstGeom prst="rect">
+            <a:avLst/>
+          </a:prstGeom>
+          <a:noFill/>
+        </p:spPr>
+        <p:txBody>
+          <a:bodyPr wrap="square">
+            <a:spAutoFit/>
+          </a:bodyPr>
+          <a:lstStyle/>
+          <a:p>
+            <a:pPr>
+              <a:lnSpc>
+                <a:spcPct val="150000"/>
+              </a:lnSpc>
+              <a:buNone/>
+            </a:pPr>
+            <a:r>
+              <a:rPr lang="en-US" altLang="en-US" sz="1300">
+                <a:latin typeface="Arial" panose="020B0604020202020204" pitchFamily="34" charset="0"/>
+              </a:rPr>
+              <a:t>app\Http\Controllers\Backend\ProductController.php</a:t>
+            </a:r>
+            <a:endParaRPr kumimoji="0" lang="en-US" altLang="en-US" sz="1300" b="0" i="0" u="none" strike="noStrike" cap="none" normalizeH="0" baseline="0">
+              <a:ln>
+                <a:noFill/>
+              </a:ln>
+              <a:solidFill>
+                <a:schemeClr val="tx1"/>
+              </a:solidFill>
+              <a:effectLst/>
+              <a:latin typeface="Arial" panose="020B0604020202020204" pitchFamily="34" charset="0"/>
+            </a:endParaRPr>
+          </a:p>
+        </p:txBody>
+      </p:sp>
+      <p:pic>
+        <p:nvPicPr>
+          <p:cNvPr id="4" name="Picture 3">
+            <a:extLst>
+              <a:ext uri="{FF2B5EF4-FFF2-40B4-BE49-F238E27FC236}">
+                <a16:creationId xmlns:a16="http://schemas.microsoft.com/office/drawing/2014/main" id="{35A21950-665B-B61A-24F9-D4452C1EF890}"/>
+              </a:ext>
+            </a:extLst>
+          </p:cNvPr>
+          <p:cNvPicPr>
+            <a:picLocks noChangeAspect="1"/>
+          </p:cNvPicPr>
+          <p:nvPr/>
+        </p:nvPicPr>
+        <p:blipFill>
+          <a:blip r:embed="rId2"/>
+          <a:stretch>
+            <a:fillRect/>
+          </a:stretch>
+        </p:blipFill>
+        <p:spPr>
+          <a:xfrm>
+            <a:off x="4994868" y="0"/>
+            <a:ext cx="7197132" cy="6858000"/>
+          </a:xfrm>
+          <a:prstGeom prst="rect">
+            <a:avLst/>
+          </a:prstGeom>
+        </p:spPr>
+      </p:pic>
+    </p:spTree>
+    <p:extLst>
+      <p:ext uri="{BB962C8B-B14F-4D97-AF65-F5344CB8AC3E}">
+        <p14:creationId xmlns:p14="http://schemas.microsoft.com/office/powerpoint/2010/main" val="3187738665"/>
+      </p:ext>
+    </p:extLst>
+  </p:cSld>
+  <p:clrMapOvr>
+    <a:masterClrMapping/>
+  </p:clrMapOvr>
+</p:sld>
+</file>
+
+<file path=ppt/slides/slide15.xml><?xml version="1.0" encoding="utf-8"?>
+<p:sld xmlns:a="http://schemas.openxmlformats.org/drawingml/2006/main" xmlns:r="http://schemas.openxmlformats.org/officeDocument/2006/relationships" xmlns:p="http://schemas.openxmlformats.org/presentationml/2006/main">
+  <p:cSld>
+    <p:spTree>
+      <p:nvGrpSpPr>
+        <p:cNvPr id="1" name="">
+          <a:extLst>
+            <a:ext uri="{FF2B5EF4-FFF2-40B4-BE49-F238E27FC236}">
+              <a16:creationId xmlns:a16="http://schemas.microsoft.com/office/drawing/2014/main" id="{D2A128E5-BDC3-8A62-E0EC-7C7051988E59}"/>
+            </a:ext>
+          </a:extLst>
+        </p:cNvPr>
+        <p:cNvGrpSpPr/>
+        <p:nvPr/>
+      </p:nvGrpSpPr>
+      <p:grpSpPr>
+        <a:xfrm>
+          <a:off x="0" y="0"/>
+          <a:ext cx="0" cy="0"/>
+          <a:chOff x="0" y="0"/>
+          <a:chExt cx="0" cy="0"/>
+        </a:xfrm>
+      </p:grpSpPr>
+      <p:sp>
+        <p:nvSpPr>
+          <p:cNvPr id="3" name="TextBox 2">
+            <a:extLst>
+              <a:ext uri="{FF2B5EF4-FFF2-40B4-BE49-F238E27FC236}">
+                <a16:creationId xmlns:a16="http://schemas.microsoft.com/office/drawing/2014/main" id="{E15A0A56-3333-7C9C-ED68-71D3A39F32D8}"/>
+              </a:ext>
+            </a:extLst>
+          </p:cNvPr>
+          <p:cNvSpPr txBox="1"/>
+          <p:nvPr/>
+        </p:nvSpPr>
+        <p:spPr>
+          <a:xfrm>
+            <a:off x="217714" y="255046"/>
+            <a:ext cx="11756571" cy="355354"/>
+          </a:xfrm>
+          <a:prstGeom prst="rect">
+            <a:avLst/>
+          </a:prstGeom>
+          <a:noFill/>
+        </p:spPr>
+        <p:txBody>
+          <a:bodyPr wrap="square">
+            <a:spAutoFit/>
+          </a:bodyPr>
+          <a:lstStyle/>
+          <a:p>
+            <a:pPr>
+              <a:lnSpc>
+                <a:spcPct val="150000"/>
+              </a:lnSpc>
+              <a:buNone/>
+            </a:pPr>
+            <a:r>
+              <a:rPr kumimoji="0" lang="en-US" altLang="en-US" sz="1300" b="0" i="0" u="none" strike="noStrike" cap="none" normalizeH="0" baseline="0">
+                <a:ln>
+                  <a:noFill/>
+                </a:ln>
+                <a:solidFill>
+                  <a:schemeClr val="tx1"/>
+                </a:solidFill>
+                <a:effectLst/>
+                <a:latin typeface="Arial" panose="020B0604020202020204" pitchFamily="34" charset="0"/>
+              </a:rPr>
+              <a:t>.</a:t>
+            </a:r>
+          </a:p>
+        </p:txBody>
+      </p:sp>
+      <p:pic>
+        <p:nvPicPr>
+          <p:cNvPr id="4" name="Picture 3">
+            <a:extLst>
+              <a:ext uri="{FF2B5EF4-FFF2-40B4-BE49-F238E27FC236}">
+                <a16:creationId xmlns:a16="http://schemas.microsoft.com/office/drawing/2014/main" id="{A5824DFA-C2B4-4C4C-5128-3201D408C5B8}"/>
+              </a:ext>
+            </a:extLst>
+          </p:cNvPr>
+          <p:cNvPicPr>
+            <a:picLocks noChangeAspect="1"/>
+          </p:cNvPicPr>
+          <p:nvPr/>
+        </p:nvPicPr>
+        <p:blipFill>
+          <a:blip r:embed="rId2"/>
+          <a:stretch>
+            <a:fillRect/>
+          </a:stretch>
+        </p:blipFill>
+        <p:spPr>
+          <a:xfrm>
+            <a:off x="-1" y="1693731"/>
+            <a:ext cx="12192000" cy="5164269"/>
+          </a:xfrm>
+          <a:prstGeom prst="rect">
+            <a:avLst/>
+          </a:prstGeom>
+          <a:ln w="38100" cap="sq">
+            <a:solidFill>
+              <a:srgbClr val="000000"/>
+            </a:solidFill>
+            <a:prstDash val="solid"/>
+            <a:miter lim="800000"/>
+          </a:ln>
+          <a:effectLst>
+            <a:outerShdw blurRad="50800" dist="38100" dir="2700000" algn="tl" rotWithShape="0">
+              <a:srgbClr val="000000">
+                <a:alpha val="43000"/>
+              </a:srgbClr>
+            </a:outerShdw>
+          </a:effectLst>
+        </p:spPr>
+      </p:pic>
+    </p:spTree>
+    <p:extLst>
+      <p:ext uri="{BB962C8B-B14F-4D97-AF65-F5344CB8AC3E}">
+        <p14:creationId xmlns:p14="http://schemas.microsoft.com/office/powerpoint/2010/main" val="17436675"/>
+      </p:ext>
+    </p:extLst>
+  </p:cSld>
+  <p:clrMapOvr>
+    <a:masterClrMapping/>
+  </p:clrMapOvr>
+</p:sld>
+</file>
+
+<file path=ppt/slides/slide16.xml><?xml version="1.0" encoding="utf-8"?>
+<p:sld xmlns:a="http://schemas.openxmlformats.org/drawingml/2006/main" xmlns:r="http://schemas.openxmlformats.org/officeDocument/2006/relationships" xmlns:p="http://schemas.openxmlformats.org/presentationml/2006/main">
+  <p:cSld>
+    <p:spTree>
+      <p:nvGrpSpPr>
+        <p:cNvPr id="1" name="">
+          <a:extLst>
+            <a:ext uri="{FF2B5EF4-FFF2-40B4-BE49-F238E27FC236}">
+              <a16:creationId xmlns:a16="http://schemas.microsoft.com/office/drawing/2014/main" id="{095B22A1-791E-86E6-9562-24617AF40FFB}"/>
+            </a:ext>
+          </a:extLst>
+        </p:cNvPr>
+        <p:cNvGrpSpPr/>
+        <p:nvPr/>
+      </p:nvGrpSpPr>
+      <p:grpSpPr>
+        <a:xfrm>
+          <a:off x="0" y="0"/>
+          <a:ext cx="0" cy="0"/>
+          <a:chOff x="0" y="0"/>
+          <a:chExt cx="0" cy="0"/>
+        </a:xfrm>
+      </p:grpSpPr>
+      <p:sp>
+        <p:nvSpPr>
+          <p:cNvPr id="3" name="TextBox 2">
+            <a:extLst>
+              <a:ext uri="{FF2B5EF4-FFF2-40B4-BE49-F238E27FC236}">
+                <a16:creationId xmlns:a16="http://schemas.microsoft.com/office/drawing/2014/main" id="{BB6CAB97-E921-5ABB-E13D-1BCEFE5E53F2}"/>
+              </a:ext>
+            </a:extLst>
+          </p:cNvPr>
+          <p:cNvSpPr txBox="1"/>
+          <p:nvPr/>
+        </p:nvSpPr>
+        <p:spPr>
+          <a:xfrm>
+            <a:off x="217714" y="255046"/>
+            <a:ext cx="11756571" cy="355354"/>
+          </a:xfrm>
+          <a:prstGeom prst="rect">
+            <a:avLst/>
+          </a:prstGeom>
+          <a:noFill/>
+        </p:spPr>
+        <p:txBody>
+          <a:bodyPr wrap="square">
+            <a:spAutoFit/>
+          </a:bodyPr>
+          <a:lstStyle/>
+          <a:p>
+            <a:pPr>
+              <a:lnSpc>
+                <a:spcPct val="150000"/>
+              </a:lnSpc>
+              <a:buNone/>
+            </a:pPr>
+            <a:r>
+              <a:rPr kumimoji="0" lang="en-US" altLang="en-US" sz="1300" b="0" i="0" u="none" strike="noStrike" cap="none" normalizeH="0" baseline="0">
+                <a:ln>
+                  <a:noFill/>
+                </a:ln>
+                <a:solidFill>
+                  <a:schemeClr val="tx1"/>
+                </a:solidFill>
+                <a:effectLst/>
+                <a:latin typeface="Arial" panose="020B0604020202020204" pitchFamily="34" charset="0"/>
+              </a:rPr>
+              <a:t>.</a:t>
+            </a:r>
+          </a:p>
+        </p:txBody>
+      </p:sp>
+    </p:spTree>
+    <p:extLst>
+      <p:ext uri="{BB962C8B-B14F-4D97-AF65-F5344CB8AC3E}">
+        <p14:creationId xmlns:p14="http://schemas.microsoft.com/office/powerpoint/2010/main" val="1947237708"/>
+      </p:ext>
+    </p:extLst>
+  </p:cSld>
+  <p:clrMapOvr>
+    <a:masterClrMapping/>
+  </p:clrMapOvr>
+</p:sld>
+</file>
+
+<file path=ppt/slides/slide17.xml><?xml version="1.0" encoding="utf-8"?>
+<p:sld xmlns:a="http://schemas.openxmlformats.org/drawingml/2006/main" xmlns:r="http://schemas.openxmlformats.org/officeDocument/2006/relationships" xmlns:p="http://schemas.openxmlformats.org/presentationml/2006/main">
+  <p:cSld>
+    <p:spTree>
+      <p:nvGrpSpPr>
+        <p:cNvPr id="1" name="">
+          <a:extLst>
+            <a:ext uri="{FF2B5EF4-FFF2-40B4-BE49-F238E27FC236}">
+              <a16:creationId xmlns:a16="http://schemas.microsoft.com/office/drawing/2014/main" id="{EB74D863-9C7B-01CC-080A-B889DCA59635}"/>
+            </a:ext>
+          </a:extLst>
+        </p:cNvPr>
+        <p:cNvGrpSpPr/>
+        <p:nvPr/>
+      </p:nvGrpSpPr>
+      <p:grpSpPr>
+        <a:xfrm>
+          <a:off x="0" y="0"/>
+          <a:ext cx="0" cy="0"/>
+          <a:chOff x="0" y="0"/>
+          <a:chExt cx="0" cy="0"/>
+        </a:xfrm>
+      </p:grpSpPr>
+      <p:sp>
+        <p:nvSpPr>
+          <p:cNvPr id="3" name="TextBox 2">
+            <a:extLst>
+              <a:ext uri="{FF2B5EF4-FFF2-40B4-BE49-F238E27FC236}">
+                <a16:creationId xmlns:a16="http://schemas.microsoft.com/office/drawing/2014/main" id="{63E2C0FB-B79C-9307-1CBD-ECA74D78CA8E}"/>
+              </a:ext>
+            </a:extLst>
+          </p:cNvPr>
+          <p:cNvSpPr txBox="1"/>
+          <p:nvPr/>
+        </p:nvSpPr>
+        <p:spPr>
+          <a:xfrm>
+            <a:off x="217714" y="255046"/>
+            <a:ext cx="11756571" cy="355354"/>
+          </a:xfrm>
+          <a:prstGeom prst="rect">
+            <a:avLst/>
+          </a:prstGeom>
+          <a:noFill/>
+        </p:spPr>
+        <p:txBody>
+          <a:bodyPr wrap="square">
+            <a:spAutoFit/>
+          </a:bodyPr>
+          <a:lstStyle/>
+          <a:p>
+            <a:pPr>
+              <a:lnSpc>
+                <a:spcPct val="150000"/>
+              </a:lnSpc>
+              <a:buNone/>
+            </a:pPr>
+            <a:r>
+              <a:rPr kumimoji="0" lang="en-US" altLang="en-US" sz="1300" b="0" i="0" u="none" strike="noStrike" cap="none" normalizeH="0" baseline="0">
+                <a:ln>
+                  <a:noFill/>
+                </a:ln>
+                <a:solidFill>
+                  <a:schemeClr val="tx1"/>
+                </a:solidFill>
+                <a:effectLst/>
+                <a:latin typeface="Arial" panose="020B0604020202020204" pitchFamily="34" charset="0"/>
+              </a:rPr>
+              <a:t>.</a:t>
+            </a:r>
+          </a:p>
+        </p:txBody>
+      </p:sp>
+    </p:spTree>
+    <p:extLst>
+      <p:ext uri="{BB962C8B-B14F-4D97-AF65-F5344CB8AC3E}">
+        <p14:creationId xmlns:p14="http://schemas.microsoft.com/office/powerpoint/2010/main" val="2418204834"/>
       </p:ext>
     </p:extLst>
   </p:cSld>
@@ -3455,21 +4397,54 @@
               <a:buNone/>
             </a:pPr>
             <a:r>
-              <a:rPr kumimoji="0" lang="en-US" altLang="en-US" sz="1300" b="0" i="0" u="none" strike="noStrike" cap="none" normalizeH="0" baseline="0">
-                <a:ln>
-                  <a:noFill/>
-                </a:ln>
-                <a:solidFill>
-                  <a:schemeClr val="tx1"/>
-                </a:solidFill>
-                <a:effectLst/>
+              <a:rPr lang="en-US" altLang="en-US" sz="1300">
                 <a:latin typeface="Arial" panose="020B0604020202020204" pitchFamily="34" charset="0"/>
               </a:rPr>
-              <a:t>.</a:t>
-            </a:r>
-          </a:p>
-        </p:txBody>
-      </p:sp>
+              <a:t>routes\admin.php</a:t>
+            </a:r>
+            <a:endParaRPr kumimoji="0" lang="en-US" altLang="en-US" sz="1300" b="0" i="0" u="none" strike="noStrike" cap="none" normalizeH="0" baseline="0">
+              <a:ln>
+                <a:noFill/>
+              </a:ln>
+              <a:solidFill>
+                <a:schemeClr val="tx1"/>
+              </a:solidFill>
+              <a:effectLst/>
+              <a:latin typeface="Arial" panose="020B0604020202020204" pitchFamily="34" charset="0"/>
+            </a:endParaRPr>
+          </a:p>
+        </p:txBody>
+      </p:sp>
+      <p:pic>
+        <p:nvPicPr>
+          <p:cNvPr id="4" name="Picture 3">
+            <a:extLst>
+              <a:ext uri="{FF2B5EF4-FFF2-40B4-BE49-F238E27FC236}">
+                <a16:creationId xmlns:a16="http://schemas.microsoft.com/office/drawing/2014/main" id="{636C2835-1EBA-D82F-A3CA-D5E714B7B48F}"/>
+              </a:ext>
+            </a:extLst>
+          </p:cNvPr>
+          <p:cNvPicPr>
+            <a:picLocks noChangeAspect="1"/>
+          </p:cNvPicPr>
+          <p:nvPr/>
+        </p:nvPicPr>
+        <p:blipFill>
+          <a:blip r:embed="rId2"/>
+          <a:stretch>
+            <a:fillRect/>
+          </a:stretch>
+        </p:blipFill>
+        <p:spPr>
+          <a:xfrm>
+            <a:off x="0" y="1687383"/>
+            <a:ext cx="7030431" cy="1857634"/>
+          </a:xfrm>
+          <a:prstGeom prst="rect">
+            <a:avLst/>
+          </a:prstGeom>
+        </p:spPr>
+      </p:pic>
     </p:spTree>
     <p:extLst>
       <p:ext uri="{BB962C8B-B14F-4D97-AF65-F5344CB8AC3E}">
@@ -3556,10 +4531,759 @@
           </a:p>
         </p:txBody>
       </p:sp>
+      <p:pic>
+        <p:nvPicPr>
+          <p:cNvPr id="4" name="Picture 3">
+            <a:extLst>
+              <a:ext uri="{FF2B5EF4-FFF2-40B4-BE49-F238E27FC236}">
+                <a16:creationId xmlns:a16="http://schemas.microsoft.com/office/drawing/2014/main" id="{9871C9D2-A208-E75C-570B-59EFDE47CB2F}"/>
+              </a:ext>
+            </a:extLst>
+          </p:cNvPr>
+          <p:cNvPicPr>
+            <a:picLocks noChangeAspect="1"/>
+          </p:cNvPicPr>
+          <p:nvPr/>
+        </p:nvPicPr>
+        <p:blipFill>
+          <a:blip r:embed="rId2"/>
+          <a:stretch>
+            <a:fillRect/>
+          </a:stretch>
+        </p:blipFill>
+        <p:spPr>
+          <a:xfrm>
+            <a:off x="9636771" y="0"/>
+            <a:ext cx="2555229" cy="6858000"/>
+          </a:xfrm>
+          <a:prstGeom prst="rect">
+            <a:avLst/>
+          </a:prstGeom>
+        </p:spPr>
+      </p:pic>
     </p:spTree>
     <p:extLst>
       <p:ext uri="{BB962C8B-B14F-4D97-AF65-F5344CB8AC3E}">
         <p14:creationId xmlns:p14="http://schemas.microsoft.com/office/powerpoint/2010/main" val="3095838342"/>
+      </p:ext>
+    </p:extLst>
+  </p:cSld>
+  <p:clrMapOvr>
+    <a:masterClrMapping/>
+  </p:clrMapOvr>
+</p:sld>
+</file>
+
+<file path=ppt/slides/slide4.xml><?xml version="1.0" encoding="utf-8"?>
+<p:sld xmlns:a="http://schemas.openxmlformats.org/drawingml/2006/main" xmlns:r="http://schemas.openxmlformats.org/officeDocument/2006/relationships" xmlns:p="http://schemas.openxmlformats.org/presentationml/2006/main">
+  <p:cSld>
+    <p:spTree>
+      <p:nvGrpSpPr>
+        <p:cNvPr id="1" name="">
+          <a:extLst>
+            <a:ext uri="{FF2B5EF4-FFF2-40B4-BE49-F238E27FC236}">
+              <a16:creationId xmlns:a16="http://schemas.microsoft.com/office/drawing/2014/main" id="{EF66EA98-A461-29D8-FA14-50AC7D0ABE08}"/>
+            </a:ext>
+          </a:extLst>
+        </p:cNvPr>
+        <p:cNvGrpSpPr/>
+        <p:nvPr/>
+      </p:nvGrpSpPr>
+      <p:grpSpPr>
+        <a:xfrm>
+          <a:off x="0" y="0"/>
+          <a:ext cx="0" cy="0"/>
+          <a:chOff x="0" y="0"/>
+          <a:chExt cx="0" cy="0"/>
+        </a:xfrm>
+      </p:grpSpPr>
+      <p:sp>
+        <p:nvSpPr>
+          <p:cNvPr id="3" name="TextBox 2">
+            <a:extLst>
+              <a:ext uri="{FF2B5EF4-FFF2-40B4-BE49-F238E27FC236}">
+                <a16:creationId xmlns:a16="http://schemas.microsoft.com/office/drawing/2014/main" id="{57D6265D-82B0-FC24-5FBF-BC1D51B20353}"/>
+              </a:ext>
+            </a:extLst>
+          </p:cNvPr>
+          <p:cNvSpPr txBox="1"/>
+          <p:nvPr/>
+        </p:nvSpPr>
+        <p:spPr>
+          <a:xfrm>
+            <a:off x="217714" y="255046"/>
+            <a:ext cx="11756571" cy="355354"/>
+          </a:xfrm>
+          <a:prstGeom prst="rect">
+            <a:avLst/>
+          </a:prstGeom>
+          <a:noFill/>
+        </p:spPr>
+        <p:txBody>
+          <a:bodyPr wrap="square">
+            <a:spAutoFit/>
+          </a:bodyPr>
+          <a:lstStyle/>
+          <a:p>
+            <a:pPr>
+              <a:lnSpc>
+                <a:spcPct val="150000"/>
+              </a:lnSpc>
+              <a:buNone/>
+            </a:pPr>
+            <a:r>
+              <a:rPr lang="en-US" altLang="en-US" sz="1300">
+                <a:latin typeface="Arial" panose="020B0604020202020204" pitchFamily="34" charset="0"/>
+              </a:rPr>
+              <a:t>resources\views\admin\product\index.blade.php</a:t>
+            </a:r>
+            <a:endParaRPr kumimoji="0" lang="en-US" altLang="en-US" sz="1300" b="0" i="0" u="none" strike="noStrike" cap="none" normalizeH="0" baseline="0">
+              <a:ln>
+                <a:noFill/>
+              </a:ln>
+              <a:solidFill>
+                <a:schemeClr val="tx1"/>
+              </a:solidFill>
+              <a:effectLst/>
+              <a:latin typeface="Arial" panose="020B0604020202020204" pitchFamily="34" charset="0"/>
+            </a:endParaRPr>
+          </a:p>
+        </p:txBody>
+      </p:sp>
+      <p:pic>
+        <p:nvPicPr>
+          <p:cNvPr id="4" name="Picture 3">
+            <a:extLst>
+              <a:ext uri="{FF2B5EF4-FFF2-40B4-BE49-F238E27FC236}">
+                <a16:creationId xmlns:a16="http://schemas.microsoft.com/office/drawing/2014/main" id="{75DC3DEC-3635-BA83-6641-6BA3E4152535}"/>
+              </a:ext>
+            </a:extLst>
+          </p:cNvPr>
+          <p:cNvPicPr>
+            <a:picLocks noChangeAspect="1"/>
+          </p:cNvPicPr>
+          <p:nvPr/>
+        </p:nvPicPr>
+        <p:blipFill>
+          <a:blip r:embed="rId2"/>
+          <a:stretch>
+            <a:fillRect/>
+          </a:stretch>
+        </p:blipFill>
+        <p:spPr>
+          <a:xfrm>
+            <a:off x="5574631" y="0"/>
+            <a:ext cx="6617369" cy="6858000"/>
+          </a:xfrm>
+          <a:prstGeom prst="rect">
+            <a:avLst/>
+          </a:prstGeom>
+        </p:spPr>
+      </p:pic>
+    </p:spTree>
+    <p:extLst>
+      <p:ext uri="{BB962C8B-B14F-4D97-AF65-F5344CB8AC3E}">
+        <p14:creationId xmlns:p14="http://schemas.microsoft.com/office/powerpoint/2010/main" val="1364979816"/>
+      </p:ext>
+    </p:extLst>
+  </p:cSld>
+  <p:clrMapOvr>
+    <a:masterClrMapping/>
+  </p:clrMapOvr>
+</p:sld>
+</file>
+
+<file path=ppt/slides/slide5.xml><?xml version="1.0" encoding="utf-8"?>
+<p:sld xmlns:a="http://schemas.openxmlformats.org/drawingml/2006/main" xmlns:r="http://schemas.openxmlformats.org/officeDocument/2006/relationships" xmlns:p="http://schemas.openxmlformats.org/presentationml/2006/main">
+  <p:cSld>
+    <p:spTree>
+      <p:nvGrpSpPr>
+        <p:cNvPr id="1" name="">
+          <a:extLst>
+            <a:ext uri="{FF2B5EF4-FFF2-40B4-BE49-F238E27FC236}">
+              <a16:creationId xmlns:a16="http://schemas.microsoft.com/office/drawing/2014/main" id="{416D56B1-0E49-EAEC-0DB7-80CE5807FA6F}"/>
+            </a:ext>
+          </a:extLst>
+        </p:cNvPr>
+        <p:cNvGrpSpPr/>
+        <p:nvPr/>
+      </p:nvGrpSpPr>
+      <p:grpSpPr>
+        <a:xfrm>
+          <a:off x="0" y="0"/>
+          <a:ext cx="0" cy="0"/>
+          <a:chOff x="0" y="0"/>
+          <a:chExt cx="0" cy="0"/>
+        </a:xfrm>
+      </p:grpSpPr>
+      <p:sp>
+        <p:nvSpPr>
+          <p:cNvPr id="3" name="TextBox 2">
+            <a:extLst>
+              <a:ext uri="{FF2B5EF4-FFF2-40B4-BE49-F238E27FC236}">
+                <a16:creationId xmlns:a16="http://schemas.microsoft.com/office/drawing/2014/main" id="{6335A250-B3B2-6F64-1E8B-2B22690D593B}"/>
+              </a:ext>
+            </a:extLst>
+          </p:cNvPr>
+          <p:cNvSpPr txBox="1"/>
+          <p:nvPr/>
+        </p:nvSpPr>
+        <p:spPr>
+          <a:xfrm>
+            <a:off x="217714" y="255046"/>
+            <a:ext cx="11756571" cy="355354"/>
+          </a:xfrm>
+          <a:prstGeom prst="rect">
+            <a:avLst/>
+          </a:prstGeom>
+          <a:noFill/>
+        </p:spPr>
+        <p:txBody>
+          <a:bodyPr wrap="square">
+            <a:spAutoFit/>
+          </a:bodyPr>
+          <a:lstStyle/>
+          <a:p>
+            <a:pPr>
+              <a:lnSpc>
+                <a:spcPct val="150000"/>
+              </a:lnSpc>
+              <a:buNone/>
+            </a:pPr>
+            <a:r>
+              <a:rPr kumimoji="0" lang="en-US" altLang="en-US" sz="1300" b="0" i="0" u="none" strike="noStrike" cap="none" normalizeH="0" baseline="0">
+                <a:ln>
+                  <a:noFill/>
+                </a:ln>
+                <a:solidFill>
+                  <a:schemeClr val="tx1"/>
+                </a:solidFill>
+                <a:effectLst/>
+                <a:latin typeface="Arial" panose="020B0604020202020204" pitchFamily="34" charset="0"/>
+              </a:rPr>
+              <a:t>.</a:t>
+            </a:r>
+          </a:p>
+        </p:txBody>
+      </p:sp>
+      <p:pic>
+        <p:nvPicPr>
+          <p:cNvPr id="4" name="Picture 3">
+            <a:extLst>
+              <a:ext uri="{FF2B5EF4-FFF2-40B4-BE49-F238E27FC236}">
+                <a16:creationId xmlns:a16="http://schemas.microsoft.com/office/drawing/2014/main" id="{0AB585A4-3661-397B-6A64-1B13738A38EF}"/>
+              </a:ext>
+            </a:extLst>
+          </p:cNvPr>
+          <p:cNvPicPr>
+            <a:picLocks noChangeAspect="1"/>
+          </p:cNvPicPr>
+          <p:nvPr/>
+        </p:nvPicPr>
+        <p:blipFill>
+          <a:blip r:embed="rId2"/>
+          <a:stretch>
+            <a:fillRect/>
+          </a:stretch>
+        </p:blipFill>
+        <p:spPr>
+          <a:xfrm>
+            <a:off x="3999357" y="4800313"/>
+            <a:ext cx="8192643" cy="2057687"/>
+          </a:xfrm>
+          <a:prstGeom prst="rect">
+            <a:avLst/>
+          </a:prstGeom>
+        </p:spPr>
+      </p:pic>
+    </p:spTree>
+    <p:extLst>
+      <p:ext uri="{BB962C8B-B14F-4D97-AF65-F5344CB8AC3E}">
+        <p14:creationId xmlns:p14="http://schemas.microsoft.com/office/powerpoint/2010/main" val="1605831670"/>
+      </p:ext>
+    </p:extLst>
+  </p:cSld>
+  <p:clrMapOvr>
+    <a:masterClrMapping/>
+  </p:clrMapOvr>
+</p:sld>
+</file>
+
+<file path=ppt/slides/slide6.xml><?xml version="1.0" encoding="utf-8"?>
+<p:sld xmlns:a="http://schemas.openxmlformats.org/drawingml/2006/main" xmlns:r="http://schemas.openxmlformats.org/officeDocument/2006/relationships" xmlns:p="http://schemas.openxmlformats.org/presentationml/2006/main">
+  <p:cSld>
+    <p:spTree>
+      <p:nvGrpSpPr>
+        <p:cNvPr id="1" name="">
+          <a:extLst>
+            <a:ext uri="{FF2B5EF4-FFF2-40B4-BE49-F238E27FC236}">
+              <a16:creationId xmlns:a16="http://schemas.microsoft.com/office/drawing/2014/main" id="{760662AB-C20C-0F82-ACD0-C4519FC644E6}"/>
+            </a:ext>
+          </a:extLst>
+        </p:cNvPr>
+        <p:cNvGrpSpPr/>
+        <p:nvPr/>
+      </p:nvGrpSpPr>
+      <p:grpSpPr>
+        <a:xfrm>
+          <a:off x="0" y="0"/>
+          <a:ext cx="0" cy="0"/>
+          <a:chOff x="0" y="0"/>
+          <a:chExt cx="0" cy="0"/>
+        </a:xfrm>
+      </p:grpSpPr>
+      <p:sp>
+        <p:nvSpPr>
+          <p:cNvPr id="3" name="TextBox 2">
+            <a:extLst>
+              <a:ext uri="{FF2B5EF4-FFF2-40B4-BE49-F238E27FC236}">
+                <a16:creationId xmlns:a16="http://schemas.microsoft.com/office/drawing/2014/main" id="{66259157-054B-465D-E0E9-C2CEC9177BF9}"/>
+              </a:ext>
+            </a:extLst>
+          </p:cNvPr>
+          <p:cNvSpPr txBox="1"/>
+          <p:nvPr/>
+        </p:nvSpPr>
+        <p:spPr>
+          <a:xfrm>
+            <a:off x="217714" y="255046"/>
+            <a:ext cx="11756571" cy="355354"/>
+          </a:xfrm>
+          <a:prstGeom prst="rect">
+            <a:avLst/>
+          </a:prstGeom>
+          <a:noFill/>
+        </p:spPr>
+        <p:txBody>
+          <a:bodyPr wrap="square">
+            <a:spAutoFit/>
+          </a:bodyPr>
+          <a:lstStyle/>
+          <a:p>
+            <a:pPr>
+              <a:lnSpc>
+                <a:spcPct val="150000"/>
+              </a:lnSpc>
+              <a:buNone/>
+            </a:pPr>
+            <a:r>
+              <a:rPr lang="en-US" altLang="en-US" sz="1300">
+                <a:latin typeface="Arial" panose="020B0604020202020204" pitchFamily="34" charset="0"/>
+              </a:rPr>
+              <a:t>app\Http\Controllers\Backend\ProductController.php</a:t>
+            </a:r>
+            <a:endParaRPr kumimoji="0" lang="en-US" altLang="en-US" sz="1300" b="0" i="0" u="none" strike="noStrike" cap="none" normalizeH="0" baseline="0">
+              <a:ln>
+                <a:noFill/>
+              </a:ln>
+              <a:solidFill>
+                <a:schemeClr val="tx1"/>
+              </a:solidFill>
+              <a:effectLst/>
+              <a:latin typeface="Arial" panose="020B0604020202020204" pitchFamily="34" charset="0"/>
+            </a:endParaRPr>
+          </a:p>
+        </p:txBody>
+      </p:sp>
+      <p:pic>
+        <p:nvPicPr>
+          <p:cNvPr id="4" name="Picture 3">
+            <a:extLst>
+              <a:ext uri="{FF2B5EF4-FFF2-40B4-BE49-F238E27FC236}">
+                <a16:creationId xmlns:a16="http://schemas.microsoft.com/office/drawing/2014/main" id="{B40A2A17-7FDB-752F-9BE3-8CB295714B44}"/>
+              </a:ext>
+            </a:extLst>
+          </p:cNvPr>
+          <p:cNvPicPr>
+            <a:picLocks noChangeAspect="1"/>
+          </p:cNvPicPr>
+          <p:nvPr/>
+        </p:nvPicPr>
+        <p:blipFill>
+          <a:blip r:embed="rId2"/>
+          <a:stretch>
+            <a:fillRect/>
+          </a:stretch>
+        </p:blipFill>
+        <p:spPr>
+          <a:xfrm>
+            <a:off x="8239324" y="0"/>
+            <a:ext cx="3952676" cy="6858000"/>
+          </a:xfrm>
+          <a:prstGeom prst="rect">
+            <a:avLst/>
+          </a:prstGeom>
+        </p:spPr>
+      </p:pic>
+    </p:spTree>
+    <p:extLst>
+      <p:ext uri="{BB962C8B-B14F-4D97-AF65-F5344CB8AC3E}">
+        <p14:creationId xmlns:p14="http://schemas.microsoft.com/office/powerpoint/2010/main" val="393940543"/>
+      </p:ext>
+    </p:extLst>
+  </p:cSld>
+  <p:clrMapOvr>
+    <a:masterClrMapping/>
+  </p:clrMapOvr>
+</p:sld>
+</file>
+
+<file path=ppt/slides/slide7.xml><?xml version="1.0" encoding="utf-8"?>
+<p:sld xmlns:a="http://schemas.openxmlformats.org/drawingml/2006/main" xmlns:r="http://schemas.openxmlformats.org/officeDocument/2006/relationships" xmlns:p="http://schemas.openxmlformats.org/presentationml/2006/main">
+  <p:cSld>
+    <p:spTree>
+      <p:nvGrpSpPr>
+        <p:cNvPr id="1" name="">
+          <a:extLst>
+            <a:ext uri="{FF2B5EF4-FFF2-40B4-BE49-F238E27FC236}">
+              <a16:creationId xmlns:a16="http://schemas.microsoft.com/office/drawing/2014/main" id="{30E9291E-62CA-3E03-1B05-10E838CE269C}"/>
+            </a:ext>
+          </a:extLst>
+        </p:cNvPr>
+        <p:cNvGrpSpPr/>
+        <p:nvPr/>
+      </p:nvGrpSpPr>
+      <p:grpSpPr>
+        <a:xfrm>
+          <a:off x="0" y="0"/>
+          <a:ext cx="0" cy="0"/>
+          <a:chOff x="0" y="0"/>
+          <a:chExt cx="0" cy="0"/>
+        </a:xfrm>
+      </p:grpSpPr>
+      <p:sp>
+        <p:nvSpPr>
+          <p:cNvPr id="3" name="TextBox 2">
+            <a:extLst>
+              <a:ext uri="{FF2B5EF4-FFF2-40B4-BE49-F238E27FC236}">
+                <a16:creationId xmlns:a16="http://schemas.microsoft.com/office/drawing/2014/main" id="{4025295C-8407-B921-8E7C-4BCE01794F06}"/>
+              </a:ext>
+            </a:extLst>
+          </p:cNvPr>
+          <p:cNvSpPr txBox="1"/>
+          <p:nvPr/>
+        </p:nvSpPr>
+        <p:spPr>
+          <a:xfrm>
+            <a:off x="217714" y="255046"/>
+            <a:ext cx="11756571" cy="355354"/>
+          </a:xfrm>
+          <a:prstGeom prst="rect">
+            <a:avLst/>
+          </a:prstGeom>
+          <a:noFill/>
+        </p:spPr>
+        <p:txBody>
+          <a:bodyPr wrap="square">
+            <a:spAutoFit/>
+          </a:bodyPr>
+          <a:lstStyle/>
+          <a:p>
+            <a:pPr>
+              <a:lnSpc>
+                <a:spcPct val="150000"/>
+              </a:lnSpc>
+              <a:buNone/>
+            </a:pPr>
+            <a:r>
+              <a:rPr kumimoji="0" lang="en-US" altLang="en-US" sz="1300" b="0" i="0" u="none" strike="noStrike" cap="none" normalizeH="0" baseline="0">
+                <a:ln>
+                  <a:noFill/>
+                </a:ln>
+                <a:solidFill>
+                  <a:schemeClr val="tx1"/>
+                </a:solidFill>
+                <a:effectLst/>
+                <a:latin typeface="Arial" panose="020B0604020202020204" pitchFamily="34" charset="0"/>
+              </a:rPr>
+              <a:t>.</a:t>
+            </a:r>
+          </a:p>
+        </p:txBody>
+      </p:sp>
+      <p:pic>
+        <p:nvPicPr>
+          <p:cNvPr id="4" name="Picture 3">
+            <a:extLst>
+              <a:ext uri="{FF2B5EF4-FFF2-40B4-BE49-F238E27FC236}">
+                <a16:creationId xmlns:a16="http://schemas.microsoft.com/office/drawing/2014/main" id="{2AA5D5A6-3926-2AAB-B471-44A6EAA8711A}"/>
+              </a:ext>
+            </a:extLst>
+          </p:cNvPr>
+          <p:cNvPicPr>
+            <a:picLocks noChangeAspect="1"/>
+          </p:cNvPicPr>
+          <p:nvPr/>
+        </p:nvPicPr>
+        <p:blipFill>
+          <a:blip r:embed="rId2"/>
+          <a:stretch>
+            <a:fillRect/>
+          </a:stretch>
+        </p:blipFill>
+        <p:spPr>
+          <a:xfrm>
+            <a:off x="2322723" y="4276365"/>
+            <a:ext cx="9869277" cy="2581635"/>
+          </a:xfrm>
+          <a:prstGeom prst="rect">
+            <a:avLst/>
+          </a:prstGeom>
+        </p:spPr>
+      </p:pic>
+    </p:spTree>
+    <p:extLst>
+      <p:ext uri="{BB962C8B-B14F-4D97-AF65-F5344CB8AC3E}">
+        <p14:creationId xmlns:p14="http://schemas.microsoft.com/office/powerpoint/2010/main" val="3311967064"/>
+      </p:ext>
+    </p:extLst>
+  </p:cSld>
+  <p:clrMapOvr>
+    <a:masterClrMapping/>
+  </p:clrMapOvr>
+</p:sld>
+</file>
+
+<file path=ppt/slides/slide8.xml><?xml version="1.0" encoding="utf-8"?>
+<p:sld xmlns:a="http://schemas.openxmlformats.org/drawingml/2006/main" xmlns:r="http://schemas.openxmlformats.org/officeDocument/2006/relationships" xmlns:p="http://schemas.openxmlformats.org/presentationml/2006/main">
+  <p:cSld>
+    <p:spTree>
+      <p:nvGrpSpPr>
+        <p:cNvPr id="1" name="">
+          <a:extLst>
+            <a:ext uri="{FF2B5EF4-FFF2-40B4-BE49-F238E27FC236}">
+              <a16:creationId xmlns:a16="http://schemas.microsoft.com/office/drawing/2014/main" id="{E9A0D2A5-5DE6-9743-7CCE-EE922E3D39C9}"/>
+            </a:ext>
+          </a:extLst>
+        </p:cNvPr>
+        <p:cNvGrpSpPr/>
+        <p:nvPr/>
+      </p:nvGrpSpPr>
+      <p:grpSpPr>
+        <a:xfrm>
+          <a:off x="0" y="0"/>
+          <a:ext cx="0" cy="0"/>
+          <a:chOff x="0" y="0"/>
+          <a:chExt cx="0" cy="0"/>
+        </a:xfrm>
+      </p:grpSpPr>
+      <p:sp>
+        <p:nvSpPr>
+          <p:cNvPr id="3" name="TextBox 2">
+            <a:extLst>
+              <a:ext uri="{FF2B5EF4-FFF2-40B4-BE49-F238E27FC236}">
+                <a16:creationId xmlns:a16="http://schemas.microsoft.com/office/drawing/2014/main" id="{C4085AA3-6C00-373C-B644-4EB4D76BED7A}"/>
+              </a:ext>
+            </a:extLst>
+          </p:cNvPr>
+          <p:cNvSpPr txBox="1"/>
+          <p:nvPr/>
+        </p:nvSpPr>
+        <p:spPr>
+          <a:xfrm>
+            <a:off x="217714" y="255046"/>
+            <a:ext cx="11756571" cy="355354"/>
+          </a:xfrm>
+          <a:prstGeom prst="rect">
+            <a:avLst/>
+          </a:prstGeom>
+          <a:noFill/>
+        </p:spPr>
+        <p:txBody>
+          <a:bodyPr wrap="square">
+            <a:spAutoFit/>
+          </a:bodyPr>
+          <a:lstStyle/>
+          <a:p>
+            <a:pPr>
+              <a:lnSpc>
+                <a:spcPct val="150000"/>
+              </a:lnSpc>
+              <a:buNone/>
+            </a:pPr>
+            <a:r>
+              <a:rPr kumimoji="0" lang="en-US" altLang="en-US" sz="1300" b="0" i="0" u="none" strike="noStrike" cap="none" normalizeH="0" baseline="0">
+                <a:ln>
+                  <a:noFill/>
+                </a:ln>
+                <a:solidFill>
+                  <a:schemeClr val="tx1"/>
+                </a:solidFill>
+                <a:effectLst/>
+                <a:latin typeface="Arial" panose="020B0604020202020204" pitchFamily="34" charset="0"/>
+              </a:rPr>
+              <a:t>.</a:t>
+            </a:r>
+          </a:p>
+        </p:txBody>
+      </p:sp>
+      <p:pic>
+        <p:nvPicPr>
+          <p:cNvPr id="4" name="Picture 3">
+            <a:extLst>
+              <a:ext uri="{FF2B5EF4-FFF2-40B4-BE49-F238E27FC236}">
+                <a16:creationId xmlns:a16="http://schemas.microsoft.com/office/drawing/2014/main" id="{09D0D6F7-C091-67A2-7F8B-D74CB6A94304}"/>
+              </a:ext>
+            </a:extLst>
+          </p:cNvPr>
+          <p:cNvPicPr>
+            <a:picLocks noChangeAspect="1"/>
+          </p:cNvPicPr>
+          <p:nvPr/>
+        </p:nvPicPr>
+        <p:blipFill>
+          <a:blip r:embed="rId2"/>
+          <a:stretch>
+            <a:fillRect/>
+          </a:stretch>
+        </p:blipFill>
+        <p:spPr>
+          <a:xfrm>
+            <a:off x="0" y="3288988"/>
+            <a:ext cx="12192000" cy="3569012"/>
+          </a:xfrm>
+          <a:prstGeom prst="rect">
+            <a:avLst/>
+          </a:prstGeom>
+          <a:ln w="38100" cap="sq">
+            <a:solidFill>
+              <a:srgbClr val="000000"/>
+            </a:solidFill>
+            <a:prstDash val="solid"/>
+            <a:miter lim="800000"/>
+          </a:ln>
+          <a:effectLst>
+            <a:outerShdw blurRad="50800" dist="38100" dir="2700000" algn="tl" rotWithShape="0">
+              <a:srgbClr val="000000">
+                <a:alpha val="43000"/>
+              </a:srgbClr>
+            </a:outerShdw>
+          </a:effectLst>
+        </p:spPr>
+      </p:pic>
+    </p:spTree>
+    <p:extLst>
+      <p:ext uri="{BB962C8B-B14F-4D97-AF65-F5344CB8AC3E}">
+        <p14:creationId xmlns:p14="http://schemas.microsoft.com/office/powerpoint/2010/main" val="1480250330"/>
+      </p:ext>
+    </p:extLst>
+  </p:cSld>
+  <p:clrMapOvr>
+    <a:masterClrMapping/>
+  </p:clrMapOvr>
+</p:sld>
+</file>
+
+<file path=ppt/slides/slide9.xml><?xml version="1.0" encoding="utf-8"?>
+<p:sld xmlns:a="http://schemas.openxmlformats.org/drawingml/2006/main" xmlns:r="http://schemas.openxmlformats.org/officeDocument/2006/relationships" xmlns:p="http://schemas.openxmlformats.org/presentationml/2006/main">
+  <p:cSld>
+    <p:spTree>
+      <p:nvGrpSpPr>
+        <p:cNvPr id="1" name="">
+          <a:extLst>
+            <a:ext uri="{FF2B5EF4-FFF2-40B4-BE49-F238E27FC236}">
+              <a16:creationId xmlns:a16="http://schemas.microsoft.com/office/drawing/2014/main" id="{BFD257E9-3293-FD94-6829-9AC42E04B8D3}"/>
+            </a:ext>
+          </a:extLst>
+        </p:cNvPr>
+        <p:cNvGrpSpPr/>
+        <p:nvPr/>
+      </p:nvGrpSpPr>
+      <p:grpSpPr>
+        <a:xfrm>
+          <a:off x="0" y="0"/>
+          <a:ext cx="0" cy="0"/>
+          <a:chOff x="0" y="0"/>
+          <a:chExt cx="0" cy="0"/>
+        </a:xfrm>
+      </p:grpSpPr>
+      <p:sp>
+        <p:nvSpPr>
+          <p:cNvPr id="3" name="TextBox 2">
+            <a:extLst>
+              <a:ext uri="{FF2B5EF4-FFF2-40B4-BE49-F238E27FC236}">
+                <a16:creationId xmlns:a16="http://schemas.microsoft.com/office/drawing/2014/main" id="{4E06BB4C-51C9-F986-12D4-6C27FEC72035}"/>
+              </a:ext>
+            </a:extLst>
+          </p:cNvPr>
+          <p:cNvSpPr txBox="1"/>
+          <p:nvPr/>
+        </p:nvSpPr>
+        <p:spPr>
+          <a:xfrm>
+            <a:off x="217714" y="255046"/>
+            <a:ext cx="11756571" cy="355354"/>
+          </a:xfrm>
+          <a:prstGeom prst="rect">
+            <a:avLst/>
+          </a:prstGeom>
+          <a:noFill/>
+        </p:spPr>
+        <p:txBody>
+          <a:bodyPr wrap="square">
+            <a:spAutoFit/>
+          </a:bodyPr>
+          <a:lstStyle/>
+          <a:p>
+            <a:pPr>
+              <a:lnSpc>
+                <a:spcPct val="150000"/>
+              </a:lnSpc>
+              <a:buNone/>
+            </a:pPr>
+            <a:r>
+              <a:rPr lang="en-US" altLang="en-US" sz="1300">
+                <a:latin typeface="Arial" panose="020B0604020202020204" pitchFamily="34" charset="0"/>
+              </a:rPr>
+              <a:t>app\Http\Controllers\Backend\ProductController.php</a:t>
+            </a:r>
+            <a:endParaRPr kumimoji="0" lang="en-US" altLang="en-US" sz="1300" b="0" i="0" u="none" strike="noStrike" cap="none" normalizeH="0" baseline="0">
+              <a:ln>
+                <a:noFill/>
+              </a:ln>
+              <a:solidFill>
+                <a:schemeClr val="tx1"/>
+              </a:solidFill>
+              <a:effectLst/>
+              <a:latin typeface="Arial" panose="020B0604020202020204" pitchFamily="34" charset="0"/>
+            </a:endParaRPr>
+          </a:p>
+        </p:txBody>
+      </p:sp>
+      <p:pic>
+        <p:nvPicPr>
+          <p:cNvPr id="4" name="Picture 3">
+            <a:extLst>
+              <a:ext uri="{FF2B5EF4-FFF2-40B4-BE49-F238E27FC236}">
+                <a16:creationId xmlns:a16="http://schemas.microsoft.com/office/drawing/2014/main" id="{69C4BEF8-DC71-4A7D-3835-FB55CCE3739A}"/>
+              </a:ext>
+            </a:extLst>
+          </p:cNvPr>
+          <p:cNvPicPr>
+            <a:picLocks noChangeAspect="1"/>
+          </p:cNvPicPr>
+          <p:nvPr/>
+        </p:nvPicPr>
+        <p:blipFill>
+          <a:blip r:embed="rId2"/>
+          <a:stretch>
+            <a:fillRect/>
+          </a:stretch>
+        </p:blipFill>
+        <p:spPr>
+          <a:xfrm>
+            <a:off x="7491341" y="0"/>
+            <a:ext cx="4700659" cy="6858000"/>
+          </a:xfrm>
+          <a:prstGeom prst="rect">
+            <a:avLst/>
+          </a:prstGeom>
+        </p:spPr>
+      </p:pic>
+    </p:spTree>
+    <p:extLst>
+      <p:ext uri="{BB962C8B-B14F-4D97-AF65-F5344CB8AC3E}">
+        <p14:creationId xmlns:p14="http://schemas.microsoft.com/office/powerpoint/2010/main" val="2298417769"/>
       </p:ext>
     </p:extLst>
   </p:cSld>
